--- a/tanlp.pptx
+++ b/tanlp.pptx
@@ -8570,33 +8570,7 @@
                 <a:latin typeface="Times New Roman" panose="02020603050405020304" pitchFamily="18" charset="0"/>
                 <a:cs typeface="Times New Roman" panose="02020603050405020304" pitchFamily="18" charset="0"/>
               </a:rPr>
-              <a:t>82.6% accuracy, 82.2% F1-score (strong generalization using </a:t>
-            </a:r>
-            <a:r>
-              <a:rPr lang="en-US" sz="2000" dirty="0" err="1">
-                <a:solidFill>
-                  <a:schemeClr val="tx1">
-                    <a:lumMod val="95000"/>
-                    <a:lumOff val="5000"/>
-                  </a:schemeClr>
-                </a:solidFill>
-                <a:latin typeface="Times New Roman" panose="02020603050405020304" pitchFamily="18" charset="0"/>
-                <a:cs typeface="Times New Roman" panose="02020603050405020304" pitchFamily="18" charset="0"/>
-              </a:rPr>
-              <a:t>supervisedlearning</a:t>
-            </a:r>
-            <a:r>
-              <a:rPr lang="en-US" sz="2000" dirty="0">
-                <a:solidFill>
-                  <a:schemeClr val="tx1">
-                    <a:lumMod val="95000"/>
-                    <a:lumOff val="5000"/>
-                  </a:schemeClr>
-                </a:solidFill>
-                <a:latin typeface="Times New Roman" panose="02020603050405020304" pitchFamily="18" charset="0"/>
-                <a:cs typeface="Times New Roman" panose="02020603050405020304" pitchFamily="18" charset="0"/>
-              </a:rPr>
-              <a:t>)</a:t>
+              <a:t>82.6% accuracy, 82.2% F1-score (strong generalization using supervised learning)</a:t>
             </a:r>
           </a:p>
         </p:txBody>
@@ -11848,7 +11822,7 @@
         <p:spPr>
           <a:xfrm>
             <a:off x="731520" y="1120703"/>
-            <a:ext cx="10515600" cy="3390672"/>
+            <a:ext cx="10515600" cy="3421449"/>
           </a:xfrm>
           <a:prstGeom prst="rect">
             <a:avLst/>
@@ -11861,15 +11835,7 @@
           </a:bodyPr>
           <a:lstStyle/>
           <a:p>
-            <a:pPr algn="l">
-              <a:defRPr sz="2200" b="0">
-                <a:solidFill>
-                  <a:srgbClr val="FFFFFF"/>
-                </a:solidFill>
-                <a:latin typeface="Calibri"/>
-              </a:defRPr>
-            </a:pPr>
-            <a:endParaRPr dirty="0">
+            <a:endParaRPr lang="en-IN" sz="2400" dirty="0">
               <a:latin typeface="Times New Roman" panose="02020603050405020304" pitchFamily="18" charset="0"/>
               <a:cs typeface="Times New Roman" panose="02020603050405020304" pitchFamily="18" charset="0"/>
             </a:endParaRPr>

--- a/tanlp.pptx
+++ b/tanlp.pptx
@@ -565,7 +565,7 @@
           <a:p>
             <a:fld id="{5434F436-B577-4E44-87D6-7BE0F3385518}" type="datetimeFigureOut">
               <a:rPr lang="en-IN" smtClean="0"/>
-              <a:t>24-04-2026</a:t>
+              <a:t>26-04-2026</a:t>
             </a:fld>
             <a:endParaRPr lang="en-IN" dirty="0"/>
           </a:p>
@@ -982,7 +982,7 @@
           <a:p>
             <a:fld id="{40123F54-0B71-4A1A-8BE3-898972AD2A15}" type="datetimeFigureOut">
               <a:rPr lang="en-IN" smtClean="0"/>
-              <a:t>24-04-2026</a:t>
+              <a:t>26-04-2026</a:t>
             </a:fld>
             <a:endParaRPr lang="en-IN" dirty="0"/>
           </a:p>
@@ -1182,7 +1182,7 @@
           <a:p>
             <a:fld id="{40123F54-0B71-4A1A-8BE3-898972AD2A15}" type="datetimeFigureOut">
               <a:rPr lang="en-IN" smtClean="0"/>
-              <a:t>24-04-2026</a:t>
+              <a:t>26-04-2026</a:t>
             </a:fld>
             <a:endParaRPr lang="en-IN" dirty="0"/>
           </a:p>
@@ -1392,7 +1392,7 @@
           <a:p>
             <a:fld id="{40123F54-0B71-4A1A-8BE3-898972AD2A15}" type="datetimeFigureOut">
               <a:rPr lang="en-IN" smtClean="0"/>
-              <a:t>24-04-2026</a:t>
+              <a:t>26-04-2026</a:t>
             </a:fld>
             <a:endParaRPr lang="en-IN" dirty="0"/>
           </a:p>
@@ -1592,7 +1592,7 @@
           <a:p>
             <a:fld id="{40123F54-0B71-4A1A-8BE3-898972AD2A15}" type="datetimeFigureOut">
               <a:rPr lang="en-IN" smtClean="0"/>
-              <a:t>24-04-2026</a:t>
+              <a:t>26-04-2026</a:t>
             </a:fld>
             <a:endParaRPr lang="en-IN" dirty="0"/>
           </a:p>
@@ -1868,7 +1868,7 @@
           <a:p>
             <a:fld id="{40123F54-0B71-4A1A-8BE3-898972AD2A15}" type="datetimeFigureOut">
               <a:rPr lang="en-IN" smtClean="0"/>
-              <a:t>24-04-2026</a:t>
+              <a:t>26-04-2026</a:t>
             </a:fld>
             <a:endParaRPr lang="en-IN" dirty="0"/>
           </a:p>
@@ -2136,7 +2136,7 @@
           <a:p>
             <a:fld id="{40123F54-0B71-4A1A-8BE3-898972AD2A15}" type="datetimeFigureOut">
               <a:rPr lang="en-IN" smtClean="0"/>
-              <a:t>24-04-2026</a:t>
+              <a:t>26-04-2026</a:t>
             </a:fld>
             <a:endParaRPr lang="en-IN" dirty="0"/>
           </a:p>
@@ -2551,7 +2551,7 @@
           <a:p>
             <a:fld id="{40123F54-0B71-4A1A-8BE3-898972AD2A15}" type="datetimeFigureOut">
               <a:rPr lang="en-IN" smtClean="0"/>
-              <a:t>24-04-2026</a:t>
+              <a:t>26-04-2026</a:t>
             </a:fld>
             <a:endParaRPr lang="en-IN" dirty="0"/>
           </a:p>
@@ -2693,7 +2693,7 @@
           <a:p>
             <a:fld id="{40123F54-0B71-4A1A-8BE3-898972AD2A15}" type="datetimeFigureOut">
               <a:rPr lang="en-IN" smtClean="0"/>
-              <a:t>24-04-2026</a:t>
+              <a:t>26-04-2026</a:t>
             </a:fld>
             <a:endParaRPr lang="en-IN" dirty="0"/>
           </a:p>
@@ -2806,7 +2806,7 @@
           <a:p>
             <a:fld id="{40123F54-0B71-4A1A-8BE3-898972AD2A15}" type="datetimeFigureOut">
               <a:rPr lang="en-IN" smtClean="0"/>
-              <a:t>24-04-2026</a:t>
+              <a:t>26-04-2026</a:t>
             </a:fld>
             <a:endParaRPr lang="en-IN" dirty="0"/>
           </a:p>
@@ -3119,7 +3119,7 @@
           <a:p>
             <a:fld id="{40123F54-0B71-4A1A-8BE3-898972AD2A15}" type="datetimeFigureOut">
               <a:rPr lang="en-IN" smtClean="0"/>
-              <a:t>24-04-2026</a:t>
+              <a:t>26-04-2026</a:t>
             </a:fld>
             <a:endParaRPr lang="en-IN" dirty="0"/>
           </a:p>
@@ -3408,7 +3408,7 @@
           <a:p>
             <a:fld id="{40123F54-0B71-4A1A-8BE3-898972AD2A15}" type="datetimeFigureOut">
               <a:rPr lang="en-IN" smtClean="0"/>
-              <a:t>24-04-2026</a:t>
+              <a:t>26-04-2026</a:t>
             </a:fld>
             <a:endParaRPr lang="en-IN" dirty="0"/>
           </a:p>
@@ -3651,7 +3651,7 @@
           <a:p>
             <a:fld id="{40123F54-0B71-4A1A-8BE3-898972AD2A15}" type="datetimeFigureOut">
               <a:rPr lang="en-IN" smtClean="0"/>
-              <a:t>24-04-2026</a:t>
+              <a:t>26-04-2026</a:t>
             </a:fld>
             <a:endParaRPr lang="en-IN" dirty="0"/>
           </a:p>
@@ -8987,6 +8987,92 @@
               </a:rPr>
               <a:t>Leveraging all 3 models produces more robust restaurant rankings</a:t>
             </a:r>
+          </a:p>
+        </p:txBody>
+      </p:sp>
+      <p:sp>
+        <p:nvSpPr>
+          <p:cNvPr id="3" name="TextBox 2">
+            <a:extLst>
+              <a:ext uri="{FF2B5EF4-FFF2-40B4-BE49-F238E27FC236}">
+                <a16:creationId xmlns:a16="http://schemas.microsoft.com/office/drawing/2014/main" id="{3D7586DF-33FF-5DAD-6EE7-A7CF68F8A498}"/>
+              </a:ext>
+            </a:extLst>
+          </p:cNvPr>
+          <p:cNvSpPr txBox="1"/>
+          <p:nvPr/>
+        </p:nvSpPr>
+        <p:spPr>
+          <a:xfrm>
+            <a:off x="689705" y="4926330"/>
+            <a:ext cx="10058400" cy="692497"/>
+          </a:xfrm>
+          <a:prstGeom prst="rect">
+            <a:avLst/>
+          </a:prstGeom>
+          <a:noFill/>
+        </p:spPr>
+        <p:txBody>
+          <a:bodyPr wrap="square">
+            <a:spAutoFit/>
+          </a:bodyPr>
+          <a:lstStyle/>
+          <a:p>
+            <a:pPr algn="l">
+              <a:defRPr sz="1600" b="0">
+                <a:solidFill>
+                  <a:srgbClr val="CCCCDD"/>
+                </a:solidFill>
+                <a:latin typeface="Calibri"/>
+              </a:defRPr>
+            </a:pPr>
+            <a:r>
+              <a:rPr lang="en-IN" sz="2000" dirty="0">
+                <a:solidFill>
+                  <a:schemeClr val="tx1">
+                    <a:lumMod val="95000"/>
+                    <a:lumOff val="5000"/>
+                  </a:schemeClr>
+                </a:solidFill>
+                <a:latin typeface="Times New Roman" panose="02020603050405020304" pitchFamily="18" charset="0"/>
+                <a:cs typeface="Times New Roman" panose="02020603050405020304" pitchFamily="18" charset="0"/>
+              </a:rPr>
+              <a:t>GITHUB REPOSITORY LINK:</a:t>
+            </a:r>
+          </a:p>
+          <a:p>
+            <a:pPr>
+              <a:defRPr sz="1600" b="0">
+                <a:solidFill>
+                  <a:srgbClr val="CCCCDD"/>
+                </a:solidFill>
+                <a:latin typeface="Calibri"/>
+              </a:defRPr>
+            </a:pPr>
+            <a:r>
+              <a:rPr lang="en-IN" sz="1900" dirty="0">
+                <a:solidFill>
+                  <a:schemeClr val="tx1">
+                    <a:lumMod val="95000"/>
+                    <a:lumOff val="5000"/>
+                  </a:schemeClr>
+                </a:solidFill>
+                <a:latin typeface="Times New Roman" panose="02020603050405020304" pitchFamily="18" charset="0"/>
+                <a:cs typeface="Times New Roman" panose="02020603050405020304" pitchFamily="18" charset="0"/>
+                <a:hlinkClick r:id="rId3"/>
+              </a:rPr>
+              <a:t>https://github.com/Suhaniterway/sentiment-analysis-majitar</a:t>
+            </a:r>
+            <a:endParaRPr sz="1900" dirty="0">
+              <a:solidFill>
+                <a:schemeClr val="tx1">
+                  <a:lumMod val="95000"/>
+                  <a:lumOff val="5000"/>
+                </a:schemeClr>
+              </a:solidFill>
+              <a:latin typeface="Times New Roman" panose="02020603050405020304" pitchFamily="18" charset="0"/>
+              <a:cs typeface="Times New Roman" panose="02020603050405020304" pitchFamily="18" charset="0"/>
+            </a:endParaRPr>
           </a:p>
         </p:txBody>
       </p:sp>
